--- a/courses/learn_legalization/module04-01-detailed-vs-global/slides.pptx
+++ b/courses/learn_legalization/module04-01-detailed-vs-global/slides.pptx
@@ -16,6 +16,9 @@
     <p:sldId id="264" r:id="rId16"/>
     <p:sldId id="265" r:id="rId17"/>
     <p:sldId id="266" r:id="rId18"/>
+    <p:sldId id="267" r:id="rId19"/>
+    <p:sldId id="268" r:id="rId20"/>
+    <p:sldId id="269" r:id="rId21"/>
   </p:sldIdLst>
   <p:sldSz cx="12191695" cy="6858000" type="screen4x3"/>
   <p:notesSz cx="6858000" cy="9144000"/>
@@ -582,7 +585,7 @@
           <a:lstStyle/>
           <a:p>
             <a:r>
-              <a:t>Common traps: assuming snap alone legalizes; forgetting site width when checking overlap; ignoring fixed macro D at (8, 4); reporting HPWL without legality; and comparing Abacus and Tetris without naming displacement versus wirelength tradeoffs.</a:t>
+              <a:t>In the browser lab track, open the **detailed-vs-global** lab from the tools shelf. Open the interactive lab, place or snap cells on the site and row grid—or use an Apply helper—then Check. Reveal golden is study-only. Work the challenges that lock the goldens, then come back to implement the same loop yourself.</a:t>
             </a:r>
           </a:p>
         </p:txBody>
@@ -652,6 +655,146 @@
           <a:lstStyle/>
           <a:p>
             <a:r>
+              <a:t>In the implement track, open this module's EXAMPLES.md Pseudocode section and the course common solvers. Parse `tiny_legal.json`, run the algorithm with deterministic coordinates, and print legality, displacement, and HPWL. Match the browser goldens before you claim the checklist.</a:t>
+            </a:r>
+          </a:p>
+        </p:txBody>
+      </p:sp>
+      <p:sp>
+        <p:nvSpPr>
+          <p:cNvPr id="4" name="Slide Number Placeholder 3"/>
+          <p:cNvSpPr>
+            <a:spLocks noGrp="1"/>
+          </p:cNvSpPr>
+          <p:nvPr>
+            <p:ph type="sldNum" idx="5" sz="quarter"/>
+          </p:nvPr>
+        </p:nvSpPr>
+        <p:spPr/>
+      </p:sp>
+    </p:spTree>
+  </p:cSld>
+  <p:clrMapOvr>
+    <a:masterClrMapping/>
+  </p:clrMapOvr>
+</p:notes>
+</file>
+
+<file path=ppt/notesSlides/notesSlide12.xml><?xml version="1.0" encoding="utf-8"?>
+<p:notes xmlns:a="http://schemas.openxmlformats.org/drawingml/2006/main" xmlns:p="http://schemas.openxmlformats.org/presentationml/2006/main" xmlns:r="http://schemas.openxmlformats.org/officeDocument/2006/relationships">
+  <p:cSld>
+    <p:spTree>
+      <p:nvGrpSpPr>
+        <p:cNvPr id="1" name=""/>
+        <p:cNvGrpSpPr/>
+        <p:nvPr/>
+      </p:nvGrpSpPr>
+      <p:grpSpPr>
+        <a:xfrm>
+          <a:off x="0" y="0"/>
+          <a:ext cx="0" cy="0"/>
+          <a:chOff x="0" y="0"/>
+          <a:chExt cx="0" cy="0"/>
+        </a:xfrm>
+      </p:grpSpPr>
+      <p:sp>
+        <p:nvSpPr>
+          <p:cNvPr id="2" name="Slide Image Placeholder 1"/>
+          <p:cNvSpPr>
+            <a:spLocks noGrp="1"/>
+          </p:cNvSpPr>
+          <p:nvPr>
+            <p:ph type="sldImg" idx="2"/>
+          </p:nvPr>
+        </p:nvSpPr>
+        <p:spPr/>
+      </p:sp>
+      <p:sp>
+        <p:nvSpPr>
+          <p:cNvPr id="3" name="Notes Placeholder 2"/>
+          <p:cNvSpPr>
+            <a:spLocks noGrp="1"/>
+          </p:cNvSpPr>
+          <p:nvPr>
+            <p:ph type="body" idx="3" sz="quarter"/>
+          </p:nvPr>
+        </p:nvSpPr>
+        <p:spPr/>
+        <p:txBody>
+          <a:bodyPr/>
+          <a:lstStyle/>
+          <a:p>
+            <a:r>
+              <a:t>Common traps: assuming snap alone legalizes; forgetting site width when checking overlap; ignoring fixed macro D at (8, 4); reporting HPWL without legality; and comparing Abacus and Tetris without naming displacement versus wirelength tradeoffs.</a:t>
+            </a:r>
+          </a:p>
+        </p:txBody>
+      </p:sp>
+      <p:sp>
+        <p:nvSpPr>
+          <p:cNvPr id="4" name="Slide Number Placeholder 3"/>
+          <p:cNvSpPr>
+            <a:spLocks noGrp="1"/>
+          </p:cNvSpPr>
+          <p:nvPr>
+            <p:ph type="sldNum" idx="5" sz="quarter"/>
+          </p:nvPr>
+        </p:nvSpPr>
+        <p:spPr/>
+      </p:sp>
+    </p:spTree>
+  </p:cSld>
+  <p:clrMapOvr>
+    <a:masterClrMapping/>
+  </p:clrMapOvr>
+</p:notes>
+</file>
+
+<file path=ppt/notesSlides/notesSlide13.xml><?xml version="1.0" encoding="utf-8"?>
+<p:notes xmlns:a="http://schemas.openxmlformats.org/drawingml/2006/main" xmlns:p="http://schemas.openxmlformats.org/presentationml/2006/main" xmlns:r="http://schemas.openxmlformats.org/officeDocument/2006/relationships">
+  <p:cSld>
+    <p:spTree>
+      <p:nvGrpSpPr>
+        <p:cNvPr id="1" name=""/>
+        <p:cNvGrpSpPr/>
+        <p:nvPr/>
+      </p:nvGrpSpPr>
+      <p:grpSpPr>
+        <a:xfrm>
+          <a:off x="0" y="0"/>
+          <a:ext cx="0" cy="0"/>
+          <a:chOff x="0" y="0"/>
+          <a:chExt cx="0" cy="0"/>
+        </a:xfrm>
+      </p:grpSpPr>
+      <p:sp>
+        <p:nvSpPr>
+          <p:cNvPr id="2" name="Slide Image Placeholder 1"/>
+          <p:cNvSpPr>
+            <a:spLocks noGrp="1"/>
+          </p:cNvSpPr>
+          <p:nvPr>
+            <p:ph type="sldImg" idx="2"/>
+          </p:nvPr>
+        </p:nvSpPr>
+        <p:spPr/>
+      </p:sp>
+      <p:sp>
+        <p:nvSpPr>
+          <p:cNvPr id="3" name="Notes Placeholder 2"/>
+          <p:cNvSpPr>
+            <a:spLocks noGrp="1"/>
+          </p:cNvSpPr>
+          <p:nvPr>
+            <p:ph type="body" idx="3" sz="quarter"/>
+          </p:nvPr>
+        </p:nvSpPr>
+        <p:spPr/>
+        <p:txBody>
+          <a:bodyPr/>
+          <a:lstStyle/>
+          <a:p>
+            <a:r>
               <a:t>Complete the checklist for at least one track—preferably both. Implement until your metrics match the starter goldens. When you're ready, take the short quiz, then continue to the next module.</a:t>
             </a:r>
           </a:p>
@@ -725,12 +868,6 @@
               <a:t>Pick global Tetris when you want a fast pass and can afford extra movement. Pick detailed Abacus when displacement budget is tight. Report both pipelines side by side in regressions—legal first, then disp and HPWL.</a:t>
             </a:r>
           </a:p>
-          <a:p/>
-          <a:p>
-            <a:r>
-              <a:t>&lt;!-- algorithm-walkthrough --&gt;</a:t>
-            </a:r>
-          </a:p>
         </p:txBody>
       </p:sp>
       <p:sp>
@@ -798,7 +935,13 @@
           <a:lstStyle/>
           <a:p>
             <a:r>
-              <a:t>Global legalize lite maps to Tetris-style nearest-row shelf pack. On the overlap seed it legalizes with displacement six and HPWL thirty-two.</a:t>
+              <a:t>Here the sketch is two named pipelines on the same seed. Global legalize lite means Tetris. Detailed legalize lite means Abacus. Pseudocode names both so regressions do not mix the labels.</a:t>
+            </a:r>
+          </a:p>
+          <a:p/>
+          <a:p>
+            <a:r>
+              <a:t>Open this module's examples file and find the Pseudocode section. That written sketch is what you implement on the implement track and what the browser challenges measure.</a:t>
             </a:r>
           </a:p>
         </p:txBody>
@@ -868,7 +1011,7 @@
           <a:lstStyle/>
           <a:p>
             <a:r>
-              <a:t>Detailed legalize lite maps to Abacus row trial. Same seed, both legal—but displacement drops to four by spreading A, B, C across rows.</a:t>
+              <a:t>Both pipelines must end legal. Then compare displacement six versus four and HPWL thirty-two versus thirty-eight. Pick detailed when movement budget is tight; pick global when speed matters more.</a:t>
             </a:r>
           </a:p>
         </p:txBody>
@@ -938,7 +1081,7 @@
           <a:lstStyle/>
           <a:p>
             <a:r>
-              <a:t>Global and detailed both pass legality on the overlap seed. The difference is how far cells move and how HPWL shifts—thirty-two versus thirty-eight here.</a:t>
+              <a:t>Global legalize lite maps to Tetris-style nearest-row shelf pack. On the overlap seed it legalizes with displacement six and HPWL thirty-two.</a:t>
             </a:r>
           </a:p>
         </p:txBody>
@@ -1008,7 +1151,7 @@
           <a:lstStyle/>
           <a:p>
             <a:r>
-              <a:t>Global Tetris: disp six, HPWL thirty-two. Detailed Abacus: disp four, HPWL thirty-eight. Neither dominates on both axes—pick by your displacement budget.</a:t>
+              <a:t>Detailed legalize lite maps to Abacus row trial. Same seed, both legal—but displacement drops to four by spreading A, B, C across rows.</a:t>
             </a:r>
           </a:p>
         </p:txBody>
@@ -1078,13 +1221,7 @@
           <a:lstStyle/>
           <a:p>
             <a:r>
-              <a:t>Production flows often run a fast global legalize, then a detailed pass when timing or continuity needs cells near global targets. On this toy, that is Abacus over Tetris.</a:t>
-            </a:r>
-          </a:p>
-          <a:p/>
-          <a:p>
-            <a:r>
-              <a:t>&lt;!-- /algorithm-walkthrough --&gt;</a:t>
+              <a:t>Global and detailed both pass legality on the overlap seed. The difference is how far cells move and how HPWL shifts—thirty-two versus thirty-eight here.</a:t>
             </a:r>
           </a:p>
         </p:txBody>
@@ -1154,7 +1291,7 @@
           <a:lstStyle/>
           <a:p>
             <a:r>
-              <a:t>In the browser lab track, open the **detailed-vs-global** lab from the tools shelf. Load the overlap or float starter, run the legalizer once, and read legality plus displacement and HPWL when the panel shows them. Work the challenges that lock the goldens, then come back to implement the same loop yourself.</a:t>
+              <a:t>Global Tetris: disp six, HPWL thirty-two. Detailed Abacus: disp four, HPWL thirty-eight. Neither dominates on both axes—pick by your displacement budget.</a:t>
             </a:r>
           </a:p>
         </p:txBody>
@@ -1224,7 +1361,7 @@
           <a:lstStyle/>
           <a:p>
             <a:r>
-              <a:t>In the implement track, open this module's examples and the course `common/` solvers. Parse `tiny_legal.json`, run the algorithm with deterministic coordinates, and print legality, displacement, and HPWL. Match the browser goldens before you claim the checklist.</a:t>
+              <a:t>Production flows often run a fast global legalize, then a detailed pass when timing or continuity needs cells near global targets. On this toy, that is Abacus over Tetris.</a:t>
             </a:r>
           </a:p>
         </p:txBody>
@@ -4382,21 +4519,45 @@
                 </a:solidFill>
                 <a:latin typeface="Calibri"/>
               </a:rPr>
-              <a:t>Pitfalls</a:t>
-            </a:r>
-          </a:p>
-        </p:txBody>
-      </p:sp>
-      <p:sp>
-        <p:nvSpPr>
-          <p:cNvPr id="3" name="TextBox 2"/>
+              <a:t>Pick detailed when displacement is tight</a:t>
+            </a:r>
+          </a:p>
+        </p:txBody>
+      </p:sp>
+      <p:pic>
+        <p:nvPicPr>
+          <p:cNvPr id="3" name="Picture 2" descr="05-pick-detailed.png"/>
+          <p:cNvPicPr>
+            <a:picLocks noChangeAspect="1"/>
+          </p:cNvPicPr>
+          <p:nvPr/>
+        </p:nvPicPr>
+        <p:blipFill>
+          <a:blip r:embed="rId2"/>
+          <a:stretch>
+            <a:fillRect/>
+          </a:stretch>
+        </p:blipFill>
+        <p:spPr>
+          <a:xfrm>
+            <a:off x="548640" y="1143000"/>
+            <a:ext cx="9404113" cy="4572000"/>
+          </a:xfrm>
+          <a:prstGeom prst="rect">
+            <a:avLst/>
+          </a:prstGeom>
+        </p:spPr>
+      </p:pic>
+      <p:sp>
+        <p:nvSpPr>
+          <p:cNvPr id="4" name="TextBox 3"/>
           <p:cNvSpPr txBox="1"/>
           <p:nvPr/>
         </p:nvSpPr>
         <p:spPr>
           <a:xfrm>
-            <a:off x="548640" y="1234440"/>
-            <a:ext cx="11064240" cy="4937760"/>
+            <a:off x="548640" y="5897880"/>
+            <a:ext cx="11064240" cy="411480"/>
           </a:xfrm>
           <a:prstGeom prst="rect">
             <a:avLst/>
@@ -4409,32 +4570,26 @@
           </a:bodyPr>
           <a:lstStyle/>
           <a:p>
-            <a:pPr lvl="0" marL="457200" indent="-228600">
-              <a:buFont typeface="Calibri"/>
-              <a:spcAft>
-                <a:spcPts val="1000"/>
-              </a:spcAft>
-              <a:buSzPct val="100000"/>
-              <a:buChar char="•"/>
+            <a:pPr>
               <a:lnSpc>
                 <a:spcPts val="2200"/>
               </a:lnSpc>
             </a:pPr>
             <a:r>
-              <a:rPr sz="2000" b="0">
+              <a:rPr sz="1200" b="0">
                 <a:solidFill>
                   <a:srgbClr val="333333"/>
                 </a:solidFill>
                 <a:latin typeface="Calibri"/>
               </a:rPr>
-              <a:t>Common traps</a:t>
-            </a:r>
-          </a:p>
-        </p:txBody>
-      </p:sp>
-      <p:sp>
-        <p:nvSpPr>
-          <p:cNvPr id="4" name="TextBox 3"/>
+              <a:t>Pick detailed when displacement is tight</a:t>
+            </a:r>
+          </a:p>
+        </p:txBody>
+      </p:sp>
+      <p:sp>
+        <p:nvSpPr>
+          <p:cNvPr id="5" name="TextBox 4"/>
           <p:cNvSpPr txBox="1"/>
           <p:nvPr/>
         </p:nvSpPr>
@@ -4523,6 +4678,557 @@
                 </a:solidFill>
                 <a:latin typeface="Calibri"/>
               </a:rPr>
+              <a:t>Browser lab track</a:t>
+            </a:r>
+          </a:p>
+        </p:txBody>
+      </p:sp>
+      <p:sp>
+        <p:nvSpPr>
+          <p:cNvPr id="3" name="TextBox 2"/>
+          <p:cNvSpPr txBox="1"/>
+          <p:nvPr/>
+        </p:nvSpPr>
+        <p:spPr>
+          <a:xfrm>
+            <a:off x="548640" y="1234440"/>
+            <a:ext cx="11064240" cy="4937760"/>
+          </a:xfrm>
+          <a:prstGeom prst="rect">
+            <a:avLst/>
+          </a:prstGeom>
+          <a:noFill/>
+        </p:spPr>
+        <p:txBody>
+          <a:bodyPr wrap="square">
+            <a:noAutofit/>
+          </a:bodyPr>
+          <a:lstStyle/>
+          <a:p>
+            <a:pPr lvl="0" marL="457200" indent="-228600">
+              <a:buFont typeface="Calibri"/>
+              <a:spcAft>
+                <a:spcPts val="1000"/>
+              </a:spcAft>
+              <a:buSzPct val="100000"/>
+              <a:buChar char="•"/>
+              <a:lnSpc>
+                <a:spcPts val="2200"/>
+              </a:lnSpc>
+            </a:pPr>
+            <a:r>
+              <a:rPr sz="2000" b="0">
+                <a:solidFill>
+                  <a:srgbClr val="333333"/>
+                </a:solidFill>
+                <a:latin typeface="Calibri"/>
+              </a:rPr>
+              <a:t>In the browser lab track, open the </a:t>
+            </a:r>
+            <a:r>
+              <a:rPr sz="2000" b="1">
+                <a:solidFill>
+                  <a:srgbClr val="333333"/>
+                </a:solidFill>
+                <a:latin typeface="Calibri"/>
+              </a:rPr>
+              <a:t>detailed-vs-global</a:t>
+            </a:r>
+            <a:r>
+              <a:rPr sz="2000" b="0">
+                <a:solidFill>
+                  <a:srgbClr val="333333"/>
+                </a:solidFill>
+                <a:latin typeface="Calibri"/>
+              </a:rPr>
+              <a:t> lab from the tools shelf</a:t>
+            </a:r>
+          </a:p>
+          <a:p>
+            <a:pPr lvl="0" marL="457200" indent="-228600">
+              <a:buFont typeface="Calibri"/>
+              <a:spcAft>
+                <a:spcPts val="1000"/>
+              </a:spcAft>
+              <a:buSzPct val="100000"/>
+              <a:buChar char="•"/>
+              <a:lnSpc>
+                <a:spcPts val="2200"/>
+              </a:lnSpc>
+            </a:pPr>
+            <a:r>
+              <a:rPr sz="2000" b="0">
+                <a:solidFill>
+                  <a:srgbClr val="333333"/>
+                </a:solidFill>
+                <a:latin typeface="Calibri"/>
+              </a:rPr>
+              <a:t>Open the interactive lab</a:t>
+            </a:r>
+          </a:p>
+          <a:p>
+            <a:pPr lvl="0" marL="457200" indent="-228600">
+              <a:buFont typeface="Calibri"/>
+              <a:spcAft>
+                <a:spcPts val="1000"/>
+              </a:spcAft>
+              <a:buSzPct val="100000"/>
+              <a:buChar char="•"/>
+              <a:lnSpc>
+                <a:spcPts val="2200"/>
+              </a:lnSpc>
+            </a:pPr>
+            <a:r>
+              <a:rPr sz="2000" b="0">
+                <a:solidFill>
+                  <a:srgbClr val="333333"/>
+                </a:solidFill>
+                <a:latin typeface="Calibri"/>
+              </a:rPr>
+              <a:t>Reveal golden is study-only</a:t>
+            </a:r>
+          </a:p>
+          <a:p>
+            <a:pPr lvl="0" marL="457200" indent="-228600">
+              <a:buFont typeface="Calibri"/>
+              <a:spcAft>
+                <a:spcPts val="1000"/>
+              </a:spcAft>
+              <a:buSzPct val="100000"/>
+              <a:buChar char="•"/>
+              <a:lnSpc>
+                <a:spcPts val="2200"/>
+              </a:lnSpc>
+            </a:pPr>
+            <a:r>
+              <a:rPr sz="2000" b="0">
+                <a:solidFill>
+                  <a:srgbClr val="333333"/>
+                </a:solidFill>
+                <a:latin typeface="Calibri"/>
+              </a:rPr>
+              <a:t>Work the challenges that lock the goldens</a:t>
+            </a:r>
+          </a:p>
+        </p:txBody>
+      </p:sp>
+      <p:sp>
+        <p:nvSpPr>
+          <p:cNvPr id="4" name="TextBox 3"/>
+          <p:cNvSpPr txBox="1"/>
+          <p:nvPr/>
+        </p:nvSpPr>
+        <p:spPr>
+          <a:xfrm>
+            <a:off x="548640" y="6355080"/>
+            <a:ext cx="11064240" cy="320040"/>
+          </a:xfrm>
+          <a:prstGeom prst="rect">
+            <a:avLst/>
+          </a:prstGeom>
+          <a:noFill/>
+        </p:spPr>
+        <p:txBody>
+          <a:bodyPr wrap="square">
+            <a:noAutofit/>
+          </a:bodyPr>
+          <a:lstStyle/>
+          <a:p>
+            <a:pPr algn="r">
+              <a:lnSpc>
+                <a:spcPts val="2200"/>
+              </a:lnSpc>
+              <a:defRPr sz="1000" b="0">
+                <a:solidFill>
+                  <a:srgbClr val="666666"/>
+                </a:solidFill>
+                <a:latin typeface="Calibri"/>
+              </a:defRPr>
+            </a:pPr>
+            <a:r>
+              <a:t>learn_legalization — 01 detailed vs global</a:t>
+            </a:r>
+          </a:p>
+        </p:txBody>
+      </p:sp>
+    </p:spTree>
+  </p:cSld>
+  <p:clrMapOvr>
+    <a:masterClrMapping/>
+  </p:clrMapOvr>
+</p:sld>
+</file>
+
+<file path=ppt/slides/slide12.xml><?xml version="1.0" encoding="utf-8"?>
+<p:sld xmlns:a="http://schemas.openxmlformats.org/drawingml/2006/main" xmlns:p="http://schemas.openxmlformats.org/presentationml/2006/main" xmlns:r="http://schemas.openxmlformats.org/officeDocument/2006/relationships">
+  <p:cSld>
+    <p:spTree>
+      <p:nvGrpSpPr>
+        <p:cNvPr id="1" name=""/>
+        <p:cNvGrpSpPr/>
+        <p:nvPr/>
+      </p:nvGrpSpPr>
+      <p:grpSpPr/>
+      <p:sp>
+        <p:nvSpPr>
+          <p:cNvPr id="2" name="TextBox 1"/>
+          <p:cNvSpPr txBox="1"/>
+          <p:nvPr/>
+        </p:nvSpPr>
+        <p:spPr>
+          <a:xfrm>
+            <a:off x="548640" y="411480"/>
+            <a:ext cx="11064240" cy="777240"/>
+          </a:xfrm>
+          <a:prstGeom prst="rect">
+            <a:avLst/>
+          </a:prstGeom>
+          <a:noFill/>
+        </p:spPr>
+        <p:txBody>
+          <a:bodyPr wrap="square">
+            <a:noAutofit/>
+          </a:bodyPr>
+          <a:lstStyle/>
+          <a:p>
+            <a:pPr>
+              <a:lnSpc>
+                <a:spcPts val="2200"/>
+              </a:lnSpc>
+            </a:pPr>
+            <a:r>
+              <a:rPr sz="2800" b="1">
+                <a:solidFill>
+                  <a:srgbClr val="1A1A2E"/>
+                </a:solidFill>
+                <a:latin typeface="Calibri"/>
+              </a:rPr>
+              <a:t>Implement track</a:t>
+            </a:r>
+          </a:p>
+        </p:txBody>
+      </p:sp>
+      <p:sp>
+        <p:nvSpPr>
+          <p:cNvPr id="3" name="TextBox 2"/>
+          <p:cNvSpPr txBox="1"/>
+          <p:nvPr/>
+        </p:nvSpPr>
+        <p:spPr>
+          <a:xfrm>
+            <a:off x="548640" y="1234440"/>
+            <a:ext cx="11064240" cy="4937760"/>
+          </a:xfrm>
+          <a:prstGeom prst="rect">
+            <a:avLst/>
+          </a:prstGeom>
+          <a:noFill/>
+        </p:spPr>
+        <p:txBody>
+          <a:bodyPr wrap="square">
+            <a:noAutofit/>
+          </a:bodyPr>
+          <a:lstStyle/>
+          <a:p>
+            <a:pPr lvl="0" marL="457200" indent="-228600">
+              <a:buFont typeface="Calibri"/>
+              <a:spcAft>
+                <a:spcPts val="1000"/>
+              </a:spcAft>
+              <a:buSzPct val="100000"/>
+              <a:buChar char="•"/>
+              <a:lnSpc>
+                <a:spcPts val="2200"/>
+              </a:lnSpc>
+            </a:pPr>
+            <a:r>
+              <a:rPr sz="2000" b="0">
+                <a:solidFill>
+                  <a:srgbClr val="333333"/>
+                </a:solidFill>
+                <a:latin typeface="Calibri"/>
+              </a:rPr>
+              <a:t>In the implement track</a:t>
+            </a:r>
+          </a:p>
+          <a:p>
+            <a:pPr lvl="0" marL="457200" indent="-228600">
+              <a:buFont typeface="Calibri"/>
+              <a:spcAft>
+                <a:spcPts val="1000"/>
+              </a:spcAft>
+              <a:buSzPct val="100000"/>
+              <a:buChar char="•"/>
+              <a:lnSpc>
+                <a:spcPts val="2200"/>
+              </a:lnSpc>
+            </a:pPr>
+            <a:r>
+              <a:rPr sz="2000" b="0">
+                <a:solidFill>
+                  <a:srgbClr val="333333"/>
+                </a:solidFill>
+                <a:latin typeface="Calibri"/>
+              </a:rPr>
+              <a:t>Parse `tiny_legal.json`, run the algorithm with deterministic coordinates</a:t>
+            </a:r>
+          </a:p>
+          <a:p>
+            <a:pPr lvl="0" marL="457200" indent="-228600">
+              <a:buFont typeface="Calibri"/>
+              <a:spcAft>
+                <a:spcPts val="1000"/>
+              </a:spcAft>
+              <a:buSzPct val="100000"/>
+              <a:buChar char="•"/>
+              <a:lnSpc>
+                <a:spcPts val="2200"/>
+              </a:lnSpc>
+            </a:pPr>
+            <a:r>
+              <a:rPr sz="2000" b="0">
+                <a:solidFill>
+                  <a:srgbClr val="333333"/>
+                </a:solidFill>
+                <a:latin typeface="Calibri"/>
+              </a:rPr>
+              <a:t>Match the browser goldens before you claim the checklist</a:t>
+            </a:r>
+          </a:p>
+        </p:txBody>
+      </p:sp>
+      <p:sp>
+        <p:nvSpPr>
+          <p:cNvPr id="4" name="TextBox 3"/>
+          <p:cNvSpPr txBox="1"/>
+          <p:nvPr/>
+        </p:nvSpPr>
+        <p:spPr>
+          <a:xfrm>
+            <a:off x="548640" y="6355080"/>
+            <a:ext cx="11064240" cy="320040"/>
+          </a:xfrm>
+          <a:prstGeom prst="rect">
+            <a:avLst/>
+          </a:prstGeom>
+          <a:noFill/>
+        </p:spPr>
+        <p:txBody>
+          <a:bodyPr wrap="square">
+            <a:noAutofit/>
+          </a:bodyPr>
+          <a:lstStyle/>
+          <a:p>
+            <a:pPr algn="r">
+              <a:lnSpc>
+                <a:spcPts val="2200"/>
+              </a:lnSpc>
+              <a:defRPr sz="1000" b="0">
+                <a:solidFill>
+                  <a:srgbClr val="666666"/>
+                </a:solidFill>
+                <a:latin typeface="Calibri"/>
+              </a:defRPr>
+            </a:pPr>
+            <a:r>
+              <a:t>learn_legalization — 01 detailed vs global</a:t>
+            </a:r>
+          </a:p>
+        </p:txBody>
+      </p:sp>
+    </p:spTree>
+  </p:cSld>
+  <p:clrMapOvr>
+    <a:masterClrMapping/>
+  </p:clrMapOvr>
+</p:sld>
+</file>
+
+<file path=ppt/slides/slide13.xml><?xml version="1.0" encoding="utf-8"?>
+<p:sld xmlns:a="http://schemas.openxmlformats.org/drawingml/2006/main" xmlns:p="http://schemas.openxmlformats.org/presentationml/2006/main" xmlns:r="http://schemas.openxmlformats.org/officeDocument/2006/relationships">
+  <p:cSld>
+    <p:spTree>
+      <p:nvGrpSpPr>
+        <p:cNvPr id="1" name=""/>
+        <p:cNvGrpSpPr/>
+        <p:nvPr/>
+      </p:nvGrpSpPr>
+      <p:grpSpPr/>
+      <p:sp>
+        <p:nvSpPr>
+          <p:cNvPr id="2" name="TextBox 1"/>
+          <p:cNvSpPr txBox="1"/>
+          <p:nvPr/>
+        </p:nvSpPr>
+        <p:spPr>
+          <a:xfrm>
+            <a:off x="548640" y="411480"/>
+            <a:ext cx="11064240" cy="777240"/>
+          </a:xfrm>
+          <a:prstGeom prst="rect">
+            <a:avLst/>
+          </a:prstGeom>
+          <a:noFill/>
+        </p:spPr>
+        <p:txBody>
+          <a:bodyPr wrap="square">
+            <a:noAutofit/>
+          </a:bodyPr>
+          <a:lstStyle/>
+          <a:p>
+            <a:pPr>
+              <a:lnSpc>
+                <a:spcPts val="2200"/>
+              </a:lnSpc>
+            </a:pPr>
+            <a:r>
+              <a:rPr sz="2800" b="1">
+                <a:solidFill>
+                  <a:srgbClr val="1A1A2E"/>
+                </a:solidFill>
+                <a:latin typeface="Calibri"/>
+              </a:rPr>
+              <a:t>Pitfalls</a:t>
+            </a:r>
+          </a:p>
+        </p:txBody>
+      </p:sp>
+      <p:sp>
+        <p:nvSpPr>
+          <p:cNvPr id="3" name="TextBox 2"/>
+          <p:cNvSpPr txBox="1"/>
+          <p:nvPr/>
+        </p:nvSpPr>
+        <p:spPr>
+          <a:xfrm>
+            <a:off x="548640" y="1234440"/>
+            <a:ext cx="11064240" cy="4937760"/>
+          </a:xfrm>
+          <a:prstGeom prst="rect">
+            <a:avLst/>
+          </a:prstGeom>
+          <a:noFill/>
+        </p:spPr>
+        <p:txBody>
+          <a:bodyPr wrap="square">
+            <a:noAutofit/>
+          </a:bodyPr>
+          <a:lstStyle/>
+          <a:p>
+            <a:pPr lvl="0" marL="457200" indent="-228600">
+              <a:buFont typeface="Calibri"/>
+              <a:spcAft>
+                <a:spcPts val="1000"/>
+              </a:spcAft>
+              <a:buSzPct val="100000"/>
+              <a:buChar char="•"/>
+              <a:lnSpc>
+                <a:spcPts val="2200"/>
+              </a:lnSpc>
+            </a:pPr>
+            <a:r>
+              <a:rPr sz="2000" b="0">
+                <a:solidFill>
+                  <a:srgbClr val="333333"/>
+                </a:solidFill>
+                <a:latin typeface="Calibri"/>
+              </a:rPr>
+              <a:t>Common traps</a:t>
+            </a:r>
+          </a:p>
+        </p:txBody>
+      </p:sp>
+      <p:sp>
+        <p:nvSpPr>
+          <p:cNvPr id="4" name="TextBox 3"/>
+          <p:cNvSpPr txBox="1"/>
+          <p:nvPr/>
+        </p:nvSpPr>
+        <p:spPr>
+          <a:xfrm>
+            <a:off x="548640" y="6355080"/>
+            <a:ext cx="11064240" cy="320040"/>
+          </a:xfrm>
+          <a:prstGeom prst="rect">
+            <a:avLst/>
+          </a:prstGeom>
+          <a:noFill/>
+        </p:spPr>
+        <p:txBody>
+          <a:bodyPr wrap="square">
+            <a:noAutofit/>
+          </a:bodyPr>
+          <a:lstStyle/>
+          <a:p>
+            <a:pPr algn="r">
+              <a:lnSpc>
+                <a:spcPts val="2200"/>
+              </a:lnSpc>
+              <a:defRPr sz="1000" b="0">
+                <a:solidFill>
+                  <a:srgbClr val="666666"/>
+                </a:solidFill>
+                <a:latin typeface="Calibri"/>
+              </a:defRPr>
+            </a:pPr>
+            <a:r>
+              <a:t>learn_legalization — 01 detailed vs global</a:t>
+            </a:r>
+          </a:p>
+        </p:txBody>
+      </p:sp>
+    </p:spTree>
+  </p:cSld>
+  <p:clrMapOvr>
+    <a:masterClrMapping/>
+  </p:clrMapOvr>
+</p:sld>
+</file>
+
+<file path=ppt/slides/slide14.xml><?xml version="1.0" encoding="utf-8"?>
+<p:sld xmlns:a="http://schemas.openxmlformats.org/drawingml/2006/main" xmlns:p="http://schemas.openxmlformats.org/presentationml/2006/main" xmlns:r="http://schemas.openxmlformats.org/officeDocument/2006/relationships">
+  <p:cSld>
+    <p:spTree>
+      <p:nvGrpSpPr>
+        <p:cNvPr id="1" name=""/>
+        <p:cNvGrpSpPr/>
+        <p:nvPr/>
+      </p:nvGrpSpPr>
+      <p:grpSpPr/>
+      <p:sp>
+        <p:nvSpPr>
+          <p:cNvPr id="2" name="TextBox 1"/>
+          <p:cNvSpPr txBox="1"/>
+          <p:nvPr/>
+        </p:nvSpPr>
+        <p:spPr>
+          <a:xfrm>
+            <a:off x="548640" y="411480"/>
+            <a:ext cx="11064240" cy="777240"/>
+          </a:xfrm>
+          <a:prstGeom prst="rect">
+            <a:avLst/>
+          </a:prstGeom>
+          <a:noFill/>
+        </p:spPr>
+        <p:txBody>
+          <a:bodyPr wrap="square">
+            <a:noAutofit/>
+          </a:bodyPr>
+          <a:lstStyle/>
+          <a:p>
+            <a:pPr>
+              <a:lnSpc>
+                <a:spcPts val="2200"/>
+              </a:lnSpc>
+            </a:pPr>
+            <a:r>
+              <a:rPr sz="2800" b="1">
+                <a:solidFill>
+                  <a:srgbClr val="1A1A2E"/>
+                </a:solidFill>
+                <a:latin typeface="Calibri"/>
+              </a:rPr>
               <a:t>Your turn</a:t>
             </a:r>
           </a:p>
@@ -4800,6 +5506,125 @@
               <a:t>Report both pipelines side by side in regressions, legal first, then disp and HPWL</a:t>
             </a:r>
           </a:p>
+        </p:txBody>
+      </p:sp>
+      <p:sp>
+        <p:nvSpPr>
+          <p:cNvPr id="4" name="TextBox 3"/>
+          <p:cNvSpPr txBox="1"/>
+          <p:nvPr/>
+        </p:nvSpPr>
+        <p:spPr>
+          <a:xfrm>
+            <a:off x="548640" y="6355080"/>
+            <a:ext cx="11064240" cy="320040"/>
+          </a:xfrm>
+          <a:prstGeom prst="rect">
+            <a:avLst/>
+          </a:prstGeom>
+          <a:noFill/>
+        </p:spPr>
+        <p:txBody>
+          <a:bodyPr wrap="square">
+            <a:noAutofit/>
+          </a:bodyPr>
+          <a:lstStyle/>
+          <a:p>
+            <a:pPr algn="r">
+              <a:lnSpc>
+                <a:spcPts val="2200"/>
+              </a:lnSpc>
+              <a:defRPr sz="1000" b="0">
+                <a:solidFill>
+                  <a:srgbClr val="666666"/>
+                </a:solidFill>
+                <a:latin typeface="Calibri"/>
+              </a:defRPr>
+            </a:pPr>
+            <a:r>
+              <a:t>learn_legalization — 01 detailed vs global</a:t>
+            </a:r>
+          </a:p>
+        </p:txBody>
+      </p:sp>
+    </p:spTree>
+  </p:cSld>
+  <p:clrMapOvr>
+    <a:masterClrMapping/>
+  </p:clrMapOvr>
+</p:sld>
+</file>
+
+<file path=ppt/slides/slide3.xml><?xml version="1.0" encoding="utf-8"?>
+<p:sld xmlns:a="http://schemas.openxmlformats.org/drawingml/2006/main" xmlns:p="http://schemas.openxmlformats.org/presentationml/2006/main" xmlns:r="http://schemas.openxmlformats.org/officeDocument/2006/relationships">
+  <p:cSld>
+    <p:spTree>
+      <p:nvGrpSpPr>
+        <p:cNvPr id="1" name=""/>
+        <p:cNvGrpSpPr/>
+        <p:nvPr/>
+      </p:nvGrpSpPr>
+      <p:grpSpPr/>
+      <p:sp>
+        <p:nvSpPr>
+          <p:cNvPr id="2" name="TextBox 1"/>
+          <p:cNvSpPr txBox="1"/>
+          <p:nvPr/>
+        </p:nvSpPr>
+        <p:spPr>
+          <a:xfrm>
+            <a:off x="548640" y="411480"/>
+            <a:ext cx="11064240" cy="777240"/>
+          </a:xfrm>
+          <a:prstGeom prst="rect">
+            <a:avLst/>
+          </a:prstGeom>
+          <a:noFill/>
+        </p:spPr>
+        <p:txBody>
+          <a:bodyPr wrap="square">
+            <a:noAutofit/>
+          </a:bodyPr>
+          <a:lstStyle/>
+          <a:p>
+            <a:pPr>
+              <a:lnSpc>
+                <a:spcPts val="2200"/>
+              </a:lnSpc>
+            </a:pPr>
+            <a:r>
+              <a:rPr sz="2800" b="1">
+                <a:solidFill>
+                  <a:srgbClr val="1A1A2E"/>
+                </a:solidFill>
+                <a:latin typeface="Calibri"/>
+              </a:rPr>
+              <a:t>Pseudocode</a:t>
+            </a:r>
+          </a:p>
+        </p:txBody>
+      </p:sp>
+      <p:sp>
+        <p:nvSpPr>
+          <p:cNvPr id="3" name="TextBox 2"/>
+          <p:cNvSpPr txBox="1"/>
+          <p:nvPr/>
+        </p:nvSpPr>
+        <p:spPr>
+          <a:xfrm>
+            <a:off x="548640" y="1234440"/>
+            <a:ext cx="11064240" cy="4937760"/>
+          </a:xfrm>
+          <a:prstGeom prst="rect">
+            <a:avLst/>
+          </a:prstGeom>
+          <a:noFill/>
+        </p:spPr>
+        <p:txBody>
+          <a:bodyPr wrap="square">
+            <a:noAutofit/>
+          </a:bodyPr>
+          <a:lstStyle/>
           <a:p>
             <a:pPr lvl="0" marL="457200" indent="-228600">
               <a:buFont typeface="Calibri"/>
@@ -4819,7 +5644,117 @@
                 </a:solidFill>
                 <a:latin typeface="Calibri"/>
               </a:rPr>
-              <a:t>&lt;!-- algorithm-walkthrough --&gt;</a:t>
+              <a:t>Here the sketch is two named pipelines on the same seed</a:t>
+            </a:r>
+          </a:p>
+          <a:p>
+            <a:pPr lvl="0" marL="457200" indent="-228600">
+              <a:buFont typeface="Calibri"/>
+              <a:spcAft>
+                <a:spcPts val="1000"/>
+              </a:spcAft>
+              <a:buSzPct val="100000"/>
+              <a:buChar char="•"/>
+              <a:lnSpc>
+                <a:spcPts val="2200"/>
+              </a:lnSpc>
+            </a:pPr>
+            <a:r>
+              <a:rPr sz="2000" b="0">
+                <a:solidFill>
+                  <a:srgbClr val="333333"/>
+                </a:solidFill>
+                <a:latin typeface="Calibri"/>
+              </a:rPr>
+              <a:t>Global legalize lite means Tetris</a:t>
+            </a:r>
+          </a:p>
+          <a:p>
+            <a:pPr lvl="0" marL="457200" indent="-228600">
+              <a:buFont typeface="Calibri"/>
+              <a:spcAft>
+                <a:spcPts val="1000"/>
+              </a:spcAft>
+              <a:buSzPct val="100000"/>
+              <a:buChar char="•"/>
+              <a:lnSpc>
+                <a:spcPts val="2200"/>
+              </a:lnSpc>
+            </a:pPr>
+            <a:r>
+              <a:rPr sz="2000" b="0">
+                <a:solidFill>
+                  <a:srgbClr val="333333"/>
+                </a:solidFill>
+                <a:latin typeface="Calibri"/>
+              </a:rPr>
+              <a:t>Detailed legalize lite means Abacus</a:t>
+            </a:r>
+          </a:p>
+          <a:p>
+            <a:pPr lvl="0" marL="457200" indent="-228600">
+              <a:buFont typeface="Calibri"/>
+              <a:spcAft>
+                <a:spcPts val="1000"/>
+              </a:spcAft>
+              <a:buSzPct val="100000"/>
+              <a:buChar char="•"/>
+              <a:lnSpc>
+                <a:spcPts val="2200"/>
+              </a:lnSpc>
+            </a:pPr>
+            <a:r>
+              <a:rPr sz="2000" b="0">
+                <a:solidFill>
+                  <a:srgbClr val="333333"/>
+                </a:solidFill>
+                <a:latin typeface="Calibri"/>
+              </a:rPr>
+              <a:t>Pseudocode names both so regressions do not mix the labels</a:t>
+            </a:r>
+          </a:p>
+          <a:p>
+            <a:pPr lvl="0" marL="457200" indent="-228600">
+              <a:buFont typeface="Calibri"/>
+              <a:spcAft>
+                <a:spcPts val="1000"/>
+              </a:spcAft>
+              <a:buSzPct val="100000"/>
+              <a:buChar char="•"/>
+              <a:lnSpc>
+                <a:spcPts val="2200"/>
+              </a:lnSpc>
+            </a:pPr>
+            <a:r>
+              <a:rPr sz="2000" b="0">
+                <a:solidFill>
+                  <a:srgbClr val="333333"/>
+                </a:solidFill>
+                <a:latin typeface="Calibri"/>
+              </a:rPr>
+              <a:t>Open this module's examples file and find the Pseudocode section</a:t>
+            </a:r>
+          </a:p>
+          <a:p>
+            <a:pPr lvl="0" marL="457200" indent="-228600">
+              <a:buFont typeface="Calibri"/>
+              <a:spcAft>
+                <a:spcPts val="1000"/>
+              </a:spcAft>
+              <a:buSzPct val="100000"/>
+              <a:buChar char="•"/>
+              <a:lnSpc>
+                <a:spcPts val="2200"/>
+              </a:lnSpc>
+            </a:pPr>
+            <a:r>
+              <a:rPr sz="2000" b="0">
+                <a:solidFill>
+                  <a:srgbClr val="333333"/>
+                </a:solidFill>
+                <a:latin typeface="Calibri"/>
+              </a:rPr>
+              <a:t>That written sketch is what you implement on the implement track and what the browser</a:t>
             </a:r>
           </a:p>
         </p:txBody>
@@ -4871,7 +5806,427 @@
 </p:sld>
 </file>
 
-<file path=ppt/slides/slide3.xml><?xml version="1.0" encoding="utf-8"?>
+<file path=ppt/slides/slide4.xml><?xml version="1.0" encoding="utf-8"?>
+<p:sld xmlns:a="http://schemas.openxmlformats.org/drawingml/2006/main" xmlns:p="http://schemas.openxmlformats.org/presentationml/2006/main" xmlns:r="http://schemas.openxmlformats.org/officeDocument/2006/relationships">
+  <p:cSld>
+    <p:spTree>
+      <p:nvGrpSpPr>
+        <p:cNvPr id="1" name=""/>
+        <p:cNvGrpSpPr/>
+        <p:nvPr/>
+      </p:nvGrpSpPr>
+      <p:grpSpPr/>
+      <p:sp>
+        <p:nvSpPr>
+          <p:cNvPr id="2" name="TextBox 1"/>
+          <p:cNvSpPr txBox="1"/>
+          <p:nvPr/>
+        </p:nvSpPr>
+        <p:spPr>
+          <a:xfrm>
+            <a:off x="548640" y="411480"/>
+            <a:ext cx="11064240" cy="777240"/>
+          </a:xfrm>
+          <a:prstGeom prst="rect">
+            <a:avLst/>
+          </a:prstGeom>
+          <a:noFill/>
+        </p:spPr>
+        <p:txBody>
+          <a:bodyPr wrap="square">
+            <a:noAutofit/>
+          </a:bodyPr>
+          <a:lstStyle/>
+          <a:p>
+            <a:pPr>
+              <a:lnSpc>
+                <a:spcPts val="2200"/>
+              </a:lnSpc>
+            </a:pPr>
+            <a:r>
+              <a:rPr sz="2800" b="1">
+                <a:solidFill>
+                  <a:srgbClr val="1A1A2E"/>
+                </a:solidFill>
+                <a:latin typeface="Calibri"/>
+              </a:rPr>
+              <a:t>Algorithm sketch</a:t>
+            </a:r>
+          </a:p>
+        </p:txBody>
+      </p:sp>
+      <p:sp>
+        <p:nvSpPr>
+          <p:cNvPr id="3" name="TextBox 2"/>
+          <p:cNvSpPr txBox="1"/>
+          <p:nvPr/>
+        </p:nvSpPr>
+        <p:spPr>
+          <a:xfrm>
+            <a:off x="548640" y="1234440"/>
+            <a:ext cx="11064240" cy="4937760"/>
+          </a:xfrm>
+          <a:prstGeom prst="rect">
+            <a:avLst/>
+          </a:prstGeom>
+          <a:noFill/>
+        </p:spPr>
+        <p:txBody>
+          <a:bodyPr wrap="square">
+            <a:noAutofit/>
+          </a:bodyPr>
+          <a:lstStyle/>
+          <a:p>
+            <a:pPr lvl="0" marL="457200" indent="-228600">
+              <a:buFont typeface="Calibri"/>
+              <a:spcAft>
+                <a:spcPts val="1000"/>
+              </a:spcAft>
+              <a:buSzPct val="100000"/>
+              <a:buChar char="•"/>
+              <a:lnSpc>
+                <a:spcPts val="2200"/>
+              </a:lnSpc>
+            </a:pPr>
+            <a:r>
+              <a:rPr sz="2000" b="0">
+                <a:solidFill>
+                  <a:srgbClr val="333333"/>
+                </a:solidFill>
+                <a:latin typeface="Calibri"/>
+              </a:rPr>
+              <a:t>Both pipelines must end legal</a:t>
+            </a:r>
+          </a:p>
+          <a:p>
+            <a:pPr lvl="0" marL="457200" indent="-228600">
+              <a:buFont typeface="Calibri"/>
+              <a:spcAft>
+                <a:spcPts val="1000"/>
+              </a:spcAft>
+              <a:buSzPct val="100000"/>
+              <a:buChar char="•"/>
+              <a:lnSpc>
+                <a:spcPts val="2200"/>
+              </a:lnSpc>
+            </a:pPr>
+            <a:r>
+              <a:rPr sz="2000" b="0">
+                <a:solidFill>
+                  <a:srgbClr val="333333"/>
+                </a:solidFill>
+                <a:latin typeface="Calibri"/>
+              </a:rPr>
+              <a:t>Then compare displacement six versus four and HPWL thirty-two versus thirty-eight</a:t>
+            </a:r>
+          </a:p>
+          <a:p>
+            <a:pPr lvl="0" marL="457200" indent="-228600">
+              <a:buFont typeface="Calibri"/>
+              <a:spcAft>
+                <a:spcPts val="1000"/>
+              </a:spcAft>
+              <a:buSzPct val="100000"/>
+              <a:buChar char="•"/>
+              <a:lnSpc>
+                <a:spcPts val="2200"/>
+              </a:lnSpc>
+            </a:pPr>
+            <a:r>
+              <a:rPr sz="2000" b="0">
+                <a:solidFill>
+                  <a:srgbClr val="333333"/>
+                </a:solidFill>
+                <a:latin typeface="Calibri"/>
+              </a:rPr>
+              <a:t>Pick detailed when movement budget is tight; pick global when speed matters more</a:t>
+            </a:r>
+          </a:p>
+        </p:txBody>
+      </p:sp>
+      <p:sp>
+        <p:nvSpPr>
+          <p:cNvPr id="4" name="TextBox 3"/>
+          <p:cNvSpPr txBox="1"/>
+          <p:nvPr/>
+        </p:nvSpPr>
+        <p:spPr>
+          <a:xfrm>
+            <a:off x="548640" y="6355080"/>
+            <a:ext cx="11064240" cy="320040"/>
+          </a:xfrm>
+          <a:prstGeom prst="rect">
+            <a:avLst/>
+          </a:prstGeom>
+          <a:noFill/>
+        </p:spPr>
+        <p:txBody>
+          <a:bodyPr wrap="square">
+            <a:noAutofit/>
+          </a:bodyPr>
+          <a:lstStyle/>
+          <a:p>
+            <a:pPr algn="r">
+              <a:lnSpc>
+                <a:spcPts val="2200"/>
+              </a:lnSpc>
+              <a:defRPr sz="1000" b="0">
+                <a:solidFill>
+                  <a:srgbClr val="666666"/>
+                </a:solidFill>
+                <a:latin typeface="Calibri"/>
+              </a:defRPr>
+            </a:pPr>
+            <a:r>
+              <a:t>learn_legalization — 01 detailed vs global</a:t>
+            </a:r>
+          </a:p>
+        </p:txBody>
+      </p:sp>
+    </p:spTree>
+  </p:cSld>
+  <p:clrMapOvr>
+    <a:masterClrMapping/>
+  </p:clrMapOvr>
+</p:sld>
+</file>
+
+<file path=ppt/slides/slide5.xml><?xml version="1.0" encoding="utf-8"?>
+<p:sld xmlns:a="http://schemas.openxmlformats.org/drawingml/2006/main" xmlns:p="http://schemas.openxmlformats.org/presentationml/2006/main" xmlns:r="http://schemas.openxmlformats.org/officeDocument/2006/relationships">
+  <p:cSld>
+    <p:spTree>
+      <p:nvGrpSpPr>
+        <p:cNvPr id="1" name=""/>
+        <p:cNvGrpSpPr/>
+        <p:nvPr/>
+      </p:nvGrpSpPr>
+      <p:grpSpPr/>
+      <p:sp>
+        <p:nvSpPr>
+          <p:cNvPr id="2" name="TextBox 1"/>
+          <p:cNvSpPr txBox="1"/>
+          <p:nvPr/>
+        </p:nvSpPr>
+        <p:spPr>
+          <a:xfrm>
+            <a:off x="548640" y="411480"/>
+            <a:ext cx="11064240" cy="777240"/>
+          </a:xfrm>
+          <a:prstGeom prst="rect">
+            <a:avLst/>
+          </a:prstGeom>
+          <a:noFill/>
+        </p:spPr>
+        <p:txBody>
+          <a:bodyPr wrap="square">
+            <a:noAutofit/>
+          </a:bodyPr>
+          <a:lstStyle/>
+          <a:p>
+            <a:pPr>
+              <a:lnSpc>
+                <a:spcPts val="2200"/>
+              </a:lnSpc>
+            </a:pPr>
+            <a:r>
+              <a:rPr sz="2800" b="1">
+                <a:solidFill>
+                  <a:srgbClr val="1A1A2E"/>
+                </a:solidFill>
+                <a:latin typeface="Calibri"/>
+              </a:rPr>
+              <a:t>Algorithm sketch — try these</a:t>
+            </a:r>
+          </a:p>
+        </p:txBody>
+      </p:sp>
+      <p:sp>
+        <p:nvSpPr>
+          <p:cNvPr id="3" name="TextBox 2"/>
+          <p:cNvSpPr txBox="1"/>
+          <p:nvPr/>
+        </p:nvSpPr>
+        <p:spPr>
+          <a:xfrm>
+            <a:off x="548640" y="1143000"/>
+            <a:ext cx="11064240" cy="5029200"/>
+          </a:xfrm>
+          <a:prstGeom prst="rect">
+            <a:avLst/>
+          </a:prstGeom>
+          <a:solidFill>
+            <a:srgbClr val="F4F4F4"/>
+          </a:solidFill>
+        </p:spPr>
+        <p:txBody>
+          <a:bodyPr wrap="square">
+            <a:noAutofit/>
+          </a:bodyPr>
+          <a:lstStyle/>
+          <a:p>
+            <a:pPr>
+              <a:lnSpc>
+                <a:spcPts val="2200"/>
+              </a:lnSpc>
+              <a:spcAft>
+                <a:spcPts val="400"/>
+              </a:spcAft>
+            </a:pPr>
+            <a:r>
+              <a:rPr sz="2000" b="0">
+                <a:solidFill>
+                  <a:srgbClr val="333333"/>
+                </a:solidFill>
+                <a:latin typeface="Consolas"/>
+              </a:rPr>
+              <a:t>INPUT: illegal / global positions</a:t>
+            </a:r>
+          </a:p>
+          <a:p>
+            <a:pPr>
+              <a:lnSpc>
+                <a:spcPts val="2200"/>
+              </a:lnSpc>
+              <a:spcAft>
+                <a:spcPts val="400"/>
+              </a:spcAft>
+            </a:pPr>
+            <a:r>
+              <a:rPr sz="2000" b="0">
+                <a:solidFill>
+                  <a:srgbClr val="333333"/>
+                </a:solidFill>
+                <a:latin typeface="Consolas"/>
+              </a:rPr>
+              <a:t>global:   TetrisLite → disp=6 HPWL=32</a:t>
+            </a:r>
+          </a:p>
+          <a:p>
+            <a:pPr>
+              <a:lnSpc>
+                <a:spcPts val="2200"/>
+              </a:lnSpc>
+              <a:spcAft>
+                <a:spcPts val="400"/>
+              </a:spcAft>
+            </a:pPr>
+            <a:r>
+              <a:rPr sz="2000" b="0">
+                <a:solidFill>
+                  <a:srgbClr val="333333"/>
+                </a:solidFill>
+                <a:latin typeface="Consolas"/>
+              </a:rPr>
+              <a:t>detailed: AbacusLite → disp=4 HPWL=38</a:t>
+            </a:r>
+          </a:p>
+          <a:p>
+            <a:pPr>
+              <a:lnSpc>
+                <a:spcPts val="2200"/>
+              </a:lnSpc>
+              <a:spcAft>
+                <a:spcPts val="400"/>
+              </a:spcAft>
+            </a:pPr>
+            <a:r>
+              <a:rPr sz="2000" b="0">
+                <a:solidFill>
+                  <a:srgbClr val="333333"/>
+                </a:solidFill>
+                <a:latin typeface="Consolas"/>
+              </a:rPr>
+              <a:t>both must report legal=true</a:t>
+            </a:r>
+          </a:p>
+          <a:p>
+            <a:pPr>
+              <a:lnSpc>
+                <a:spcPts val="2200"/>
+              </a:lnSpc>
+              <a:spcAft>
+                <a:spcPts val="400"/>
+              </a:spcAft>
+            </a:pPr>
+            <a:r>
+              <a:rPr sz="2000" b="0">
+                <a:solidFill>
+                  <a:srgbClr val="333333"/>
+                </a:solidFill>
+                <a:latin typeface="Consolas"/>
+              </a:rPr>
+              <a:t>CHOOSE detailed when disp budget is tight</a:t>
+            </a:r>
+          </a:p>
+          <a:p>
+            <a:pPr>
+              <a:lnSpc>
+                <a:spcPts val="2200"/>
+              </a:lnSpc>
+              <a:spcAft>
+                <a:spcPts val="400"/>
+              </a:spcAft>
+            </a:pPr>
+            <a:r>
+              <a:rPr sz="2000" b="0">
+                <a:solidFill>
+                  <a:srgbClr val="333333"/>
+                </a:solidFill>
+                <a:latin typeface="Consolas"/>
+              </a:rPr>
+              <a:t>CHOOSE global when a fast shelf pack is enough</a:t>
+            </a:r>
+          </a:p>
+        </p:txBody>
+      </p:sp>
+      <p:sp>
+        <p:nvSpPr>
+          <p:cNvPr id="4" name="TextBox 3"/>
+          <p:cNvSpPr txBox="1"/>
+          <p:nvPr/>
+        </p:nvSpPr>
+        <p:spPr>
+          <a:xfrm>
+            <a:off x="548640" y="6355080"/>
+            <a:ext cx="11064240" cy="320040"/>
+          </a:xfrm>
+          <a:prstGeom prst="rect">
+            <a:avLst/>
+          </a:prstGeom>
+          <a:noFill/>
+        </p:spPr>
+        <p:txBody>
+          <a:bodyPr wrap="square">
+            <a:noAutofit/>
+          </a:bodyPr>
+          <a:lstStyle/>
+          <a:p>
+            <a:pPr algn="r">
+              <a:lnSpc>
+                <a:spcPts val="2200"/>
+              </a:lnSpc>
+              <a:defRPr sz="1000" b="0">
+                <a:solidFill>
+                  <a:srgbClr val="666666"/>
+                </a:solidFill>
+                <a:latin typeface="Calibri"/>
+              </a:defRPr>
+            </a:pPr>
+            <a:r>
+              <a:t>learn_legalization — 01 detailed vs global</a:t>
+            </a:r>
+          </a:p>
+        </p:txBody>
+      </p:sp>
+    </p:spTree>
+  </p:cSld>
+  <p:clrMapOvr>
+    <a:masterClrMapping/>
+  </p:clrMapOvr>
+</p:sld>
+</file>
+
+<file path=ppt/slides/slide6.xml><?xml version="1.0" encoding="utf-8"?>
 <p:sld xmlns:a="http://schemas.openxmlformats.org/drawingml/2006/main" xmlns:p="http://schemas.openxmlformats.org/presentationml/2006/main" xmlns:r="http://schemas.openxmlformats.org/officeDocument/2006/relationships">
   <p:cSld>
     <p:spTree>
@@ -5030,7 +6385,7 @@
 </p:sld>
 </file>
 
-<file path=ppt/slides/slide4.xml><?xml version="1.0" encoding="utf-8"?>
+<file path=ppt/slides/slide7.xml><?xml version="1.0" encoding="utf-8"?>
 <p:sld xmlns:a="http://schemas.openxmlformats.org/drawingml/2006/main" xmlns:p="http://schemas.openxmlformats.org/presentationml/2006/main" xmlns:r="http://schemas.openxmlformats.org/officeDocument/2006/relationships">
   <p:cSld>
     <p:spTree>
@@ -5189,7 +6544,7 @@
 </p:sld>
 </file>
 
-<file path=ppt/slides/slide5.xml><?xml version="1.0" encoding="utf-8"?>
+<file path=ppt/slides/slide8.xml><?xml version="1.0" encoding="utf-8"?>
 <p:sld xmlns:a="http://schemas.openxmlformats.org/drawingml/2006/main" xmlns:p="http://schemas.openxmlformats.org/presentationml/2006/main" xmlns:r="http://schemas.openxmlformats.org/officeDocument/2006/relationships">
   <p:cSld>
     <p:spTree>
@@ -5348,7 +6703,7 @@
 </p:sld>
 </file>
 
-<file path=ppt/slides/slide6.xml><?xml version="1.0" encoding="utf-8"?>
+<file path=ppt/slides/slide9.xml><?xml version="1.0" encoding="utf-8"?>
 <p:sld xmlns:a="http://schemas.openxmlformats.org/drawingml/2006/main" xmlns:p="http://schemas.openxmlformats.org/presentationml/2006/main" xmlns:r="http://schemas.openxmlformats.org/officeDocument/2006/relationships">
   <p:cSld>
     <p:spTree>
@@ -5463,553 +6818,6 @@
       <p:sp>
         <p:nvSpPr>
           <p:cNvPr id="5" name="TextBox 4"/>
-          <p:cNvSpPr txBox="1"/>
-          <p:nvPr/>
-        </p:nvSpPr>
-        <p:spPr>
-          <a:xfrm>
-            <a:off x="548640" y="6355080"/>
-            <a:ext cx="11064240" cy="320040"/>
-          </a:xfrm>
-          <a:prstGeom prst="rect">
-            <a:avLst/>
-          </a:prstGeom>
-          <a:noFill/>
-        </p:spPr>
-        <p:txBody>
-          <a:bodyPr wrap="square">
-            <a:noAutofit/>
-          </a:bodyPr>
-          <a:lstStyle/>
-          <a:p>
-            <a:pPr algn="r">
-              <a:lnSpc>
-                <a:spcPts val="2200"/>
-              </a:lnSpc>
-              <a:defRPr sz="1000" b="0">
-                <a:solidFill>
-                  <a:srgbClr val="666666"/>
-                </a:solidFill>
-                <a:latin typeface="Calibri"/>
-              </a:defRPr>
-            </a:pPr>
-            <a:r>
-              <a:t>learn_legalization — 01 detailed vs global</a:t>
-            </a:r>
-          </a:p>
-        </p:txBody>
-      </p:sp>
-    </p:spTree>
-  </p:cSld>
-  <p:clrMapOvr>
-    <a:masterClrMapping/>
-  </p:clrMapOvr>
-</p:sld>
-</file>
-
-<file path=ppt/slides/slide7.xml><?xml version="1.0" encoding="utf-8"?>
-<p:sld xmlns:a="http://schemas.openxmlformats.org/drawingml/2006/main" xmlns:p="http://schemas.openxmlformats.org/presentationml/2006/main" xmlns:r="http://schemas.openxmlformats.org/officeDocument/2006/relationships">
-  <p:cSld>
-    <p:spTree>
-      <p:nvGrpSpPr>
-        <p:cNvPr id="1" name=""/>
-        <p:cNvGrpSpPr/>
-        <p:nvPr/>
-      </p:nvGrpSpPr>
-      <p:grpSpPr/>
-      <p:sp>
-        <p:nvSpPr>
-          <p:cNvPr id="2" name="TextBox 1"/>
-          <p:cNvSpPr txBox="1"/>
-          <p:nvPr/>
-        </p:nvSpPr>
-        <p:spPr>
-          <a:xfrm>
-            <a:off x="548640" y="411480"/>
-            <a:ext cx="11064240" cy="777240"/>
-          </a:xfrm>
-          <a:prstGeom prst="rect">
-            <a:avLst/>
-          </a:prstGeom>
-          <a:noFill/>
-        </p:spPr>
-        <p:txBody>
-          <a:bodyPr wrap="square">
-            <a:noAutofit/>
-          </a:bodyPr>
-          <a:lstStyle/>
-          <a:p>
-            <a:pPr>
-              <a:lnSpc>
-                <a:spcPts val="2200"/>
-              </a:lnSpc>
-            </a:pPr>
-            <a:r>
-              <a:rPr sz="2800" b="1">
-                <a:solidFill>
-                  <a:srgbClr val="1A1A2E"/>
-                </a:solidFill>
-                <a:latin typeface="Calibri"/>
-              </a:rPr>
-              <a:t>Pick detailed when displacement is tight</a:t>
-            </a:r>
-          </a:p>
-        </p:txBody>
-      </p:sp>
-      <p:pic>
-        <p:nvPicPr>
-          <p:cNvPr id="3" name="Picture 2" descr="05-pick-detailed.png"/>
-          <p:cNvPicPr>
-            <a:picLocks noChangeAspect="1"/>
-          </p:cNvPicPr>
-          <p:nvPr/>
-        </p:nvPicPr>
-        <p:blipFill>
-          <a:blip r:embed="rId2"/>
-          <a:stretch>
-            <a:fillRect/>
-          </a:stretch>
-        </p:blipFill>
-        <p:spPr>
-          <a:xfrm>
-            <a:off x="548640" y="1143000"/>
-            <a:ext cx="9404113" cy="4572000"/>
-          </a:xfrm>
-          <a:prstGeom prst="rect">
-            <a:avLst/>
-          </a:prstGeom>
-        </p:spPr>
-      </p:pic>
-      <p:sp>
-        <p:nvSpPr>
-          <p:cNvPr id="4" name="TextBox 3"/>
-          <p:cNvSpPr txBox="1"/>
-          <p:nvPr/>
-        </p:nvSpPr>
-        <p:spPr>
-          <a:xfrm>
-            <a:off x="548640" y="5897880"/>
-            <a:ext cx="11064240" cy="411480"/>
-          </a:xfrm>
-          <a:prstGeom prst="rect">
-            <a:avLst/>
-          </a:prstGeom>
-          <a:noFill/>
-        </p:spPr>
-        <p:txBody>
-          <a:bodyPr wrap="square">
-            <a:noAutofit/>
-          </a:bodyPr>
-          <a:lstStyle/>
-          <a:p>
-            <a:pPr>
-              <a:lnSpc>
-                <a:spcPts val="2200"/>
-              </a:lnSpc>
-            </a:pPr>
-            <a:r>
-              <a:rPr sz="1200" b="0">
-                <a:solidFill>
-                  <a:srgbClr val="333333"/>
-                </a:solidFill>
-                <a:latin typeface="Calibri"/>
-              </a:rPr>
-              <a:t>Pick detailed when displacement is tight</a:t>
-            </a:r>
-          </a:p>
-        </p:txBody>
-      </p:sp>
-      <p:sp>
-        <p:nvSpPr>
-          <p:cNvPr id="5" name="TextBox 4"/>
-          <p:cNvSpPr txBox="1"/>
-          <p:nvPr/>
-        </p:nvSpPr>
-        <p:spPr>
-          <a:xfrm>
-            <a:off x="548640" y="6355080"/>
-            <a:ext cx="11064240" cy="320040"/>
-          </a:xfrm>
-          <a:prstGeom prst="rect">
-            <a:avLst/>
-          </a:prstGeom>
-          <a:noFill/>
-        </p:spPr>
-        <p:txBody>
-          <a:bodyPr wrap="square">
-            <a:noAutofit/>
-          </a:bodyPr>
-          <a:lstStyle/>
-          <a:p>
-            <a:pPr algn="r">
-              <a:lnSpc>
-                <a:spcPts val="2200"/>
-              </a:lnSpc>
-              <a:defRPr sz="1000" b="0">
-                <a:solidFill>
-                  <a:srgbClr val="666666"/>
-                </a:solidFill>
-                <a:latin typeface="Calibri"/>
-              </a:defRPr>
-            </a:pPr>
-            <a:r>
-              <a:t>learn_legalization — 01 detailed vs global</a:t>
-            </a:r>
-          </a:p>
-        </p:txBody>
-      </p:sp>
-    </p:spTree>
-  </p:cSld>
-  <p:clrMapOvr>
-    <a:masterClrMapping/>
-  </p:clrMapOvr>
-</p:sld>
-</file>
-
-<file path=ppt/slides/slide8.xml><?xml version="1.0" encoding="utf-8"?>
-<p:sld xmlns:a="http://schemas.openxmlformats.org/drawingml/2006/main" xmlns:p="http://schemas.openxmlformats.org/presentationml/2006/main" xmlns:r="http://schemas.openxmlformats.org/officeDocument/2006/relationships">
-  <p:cSld>
-    <p:spTree>
-      <p:nvGrpSpPr>
-        <p:cNvPr id="1" name=""/>
-        <p:cNvGrpSpPr/>
-        <p:nvPr/>
-      </p:nvGrpSpPr>
-      <p:grpSpPr/>
-      <p:sp>
-        <p:nvSpPr>
-          <p:cNvPr id="2" name="TextBox 1"/>
-          <p:cNvSpPr txBox="1"/>
-          <p:nvPr/>
-        </p:nvSpPr>
-        <p:spPr>
-          <a:xfrm>
-            <a:off x="548640" y="411480"/>
-            <a:ext cx="11064240" cy="777240"/>
-          </a:xfrm>
-          <a:prstGeom prst="rect">
-            <a:avLst/>
-          </a:prstGeom>
-          <a:noFill/>
-        </p:spPr>
-        <p:txBody>
-          <a:bodyPr wrap="square">
-            <a:noAutofit/>
-          </a:bodyPr>
-          <a:lstStyle/>
-          <a:p>
-            <a:pPr>
-              <a:lnSpc>
-                <a:spcPts val="2200"/>
-              </a:lnSpc>
-            </a:pPr>
-            <a:r>
-              <a:rPr sz="2800" b="1">
-                <a:solidFill>
-                  <a:srgbClr val="1A1A2E"/>
-                </a:solidFill>
-                <a:latin typeface="Calibri"/>
-              </a:rPr>
-              <a:t>Browser lab track</a:t>
-            </a:r>
-          </a:p>
-        </p:txBody>
-      </p:sp>
-      <p:sp>
-        <p:nvSpPr>
-          <p:cNvPr id="3" name="TextBox 2"/>
-          <p:cNvSpPr txBox="1"/>
-          <p:nvPr/>
-        </p:nvSpPr>
-        <p:spPr>
-          <a:xfrm>
-            <a:off x="548640" y="1234440"/>
-            <a:ext cx="11064240" cy="4937760"/>
-          </a:xfrm>
-          <a:prstGeom prst="rect">
-            <a:avLst/>
-          </a:prstGeom>
-          <a:noFill/>
-        </p:spPr>
-        <p:txBody>
-          <a:bodyPr wrap="square">
-            <a:noAutofit/>
-          </a:bodyPr>
-          <a:lstStyle/>
-          <a:p>
-            <a:pPr lvl="0" marL="457200" indent="-228600">
-              <a:buFont typeface="Calibri"/>
-              <a:spcAft>
-                <a:spcPts val="1000"/>
-              </a:spcAft>
-              <a:buSzPct val="100000"/>
-              <a:buChar char="•"/>
-              <a:lnSpc>
-                <a:spcPts val="2200"/>
-              </a:lnSpc>
-            </a:pPr>
-            <a:r>
-              <a:rPr sz="2000" b="0">
-                <a:solidFill>
-                  <a:srgbClr val="333333"/>
-                </a:solidFill>
-                <a:latin typeface="Calibri"/>
-              </a:rPr>
-              <a:t>In the browser lab track, open the </a:t>
-            </a:r>
-            <a:r>
-              <a:rPr sz="2000" b="1">
-                <a:solidFill>
-                  <a:srgbClr val="333333"/>
-                </a:solidFill>
-                <a:latin typeface="Calibri"/>
-              </a:rPr>
-              <a:t>detailed-vs-global</a:t>
-            </a:r>
-            <a:r>
-              <a:rPr sz="2000" b="0">
-                <a:solidFill>
-                  <a:srgbClr val="333333"/>
-                </a:solidFill>
-                <a:latin typeface="Calibri"/>
-              </a:rPr>
-              <a:t> lab from the tools shelf</a:t>
-            </a:r>
-          </a:p>
-          <a:p>
-            <a:pPr lvl="0" marL="457200" indent="-228600">
-              <a:buFont typeface="Calibri"/>
-              <a:spcAft>
-                <a:spcPts val="1000"/>
-              </a:spcAft>
-              <a:buSzPct val="100000"/>
-              <a:buChar char="•"/>
-              <a:lnSpc>
-                <a:spcPts val="2200"/>
-              </a:lnSpc>
-            </a:pPr>
-            <a:r>
-              <a:rPr sz="2000" b="0">
-                <a:solidFill>
-                  <a:srgbClr val="333333"/>
-                </a:solidFill>
-                <a:latin typeface="Calibri"/>
-              </a:rPr>
-              <a:t>Load the overlap or float starter, run the legalizer once</a:t>
-            </a:r>
-          </a:p>
-          <a:p>
-            <a:pPr lvl="0" marL="457200" indent="-228600">
-              <a:buFont typeface="Calibri"/>
-              <a:spcAft>
-                <a:spcPts val="1000"/>
-              </a:spcAft>
-              <a:buSzPct val="100000"/>
-              <a:buChar char="•"/>
-              <a:lnSpc>
-                <a:spcPts val="2200"/>
-              </a:lnSpc>
-            </a:pPr>
-            <a:r>
-              <a:rPr sz="2000" b="0">
-                <a:solidFill>
-                  <a:srgbClr val="333333"/>
-                </a:solidFill>
-                <a:latin typeface="Calibri"/>
-              </a:rPr>
-              <a:t>Work the challenges that lock the goldens</a:t>
-            </a:r>
-          </a:p>
-        </p:txBody>
-      </p:sp>
-      <p:sp>
-        <p:nvSpPr>
-          <p:cNvPr id="4" name="TextBox 3"/>
-          <p:cNvSpPr txBox="1"/>
-          <p:nvPr/>
-        </p:nvSpPr>
-        <p:spPr>
-          <a:xfrm>
-            <a:off x="548640" y="6355080"/>
-            <a:ext cx="11064240" cy="320040"/>
-          </a:xfrm>
-          <a:prstGeom prst="rect">
-            <a:avLst/>
-          </a:prstGeom>
-          <a:noFill/>
-        </p:spPr>
-        <p:txBody>
-          <a:bodyPr wrap="square">
-            <a:noAutofit/>
-          </a:bodyPr>
-          <a:lstStyle/>
-          <a:p>
-            <a:pPr algn="r">
-              <a:lnSpc>
-                <a:spcPts val="2200"/>
-              </a:lnSpc>
-              <a:defRPr sz="1000" b="0">
-                <a:solidFill>
-                  <a:srgbClr val="666666"/>
-                </a:solidFill>
-                <a:latin typeface="Calibri"/>
-              </a:defRPr>
-            </a:pPr>
-            <a:r>
-              <a:t>learn_legalization — 01 detailed vs global</a:t>
-            </a:r>
-          </a:p>
-        </p:txBody>
-      </p:sp>
-    </p:spTree>
-  </p:cSld>
-  <p:clrMapOvr>
-    <a:masterClrMapping/>
-  </p:clrMapOvr>
-</p:sld>
-</file>
-
-<file path=ppt/slides/slide9.xml><?xml version="1.0" encoding="utf-8"?>
-<p:sld xmlns:a="http://schemas.openxmlformats.org/drawingml/2006/main" xmlns:p="http://schemas.openxmlformats.org/presentationml/2006/main" xmlns:r="http://schemas.openxmlformats.org/officeDocument/2006/relationships">
-  <p:cSld>
-    <p:spTree>
-      <p:nvGrpSpPr>
-        <p:cNvPr id="1" name=""/>
-        <p:cNvGrpSpPr/>
-        <p:nvPr/>
-      </p:nvGrpSpPr>
-      <p:grpSpPr/>
-      <p:sp>
-        <p:nvSpPr>
-          <p:cNvPr id="2" name="TextBox 1"/>
-          <p:cNvSpPr txBox="1"/>
-          <p:nvPr/>
-        </p:nvSpPr>
-        <p:spPr>
-          <a:xfrm>
-            <a:off x="548640" y="411480"/>
-            <a:ext cx="11064240" cy="777240"/>
-          </a:xfrm>
-          <a:prstGeom prst="rect">
-            <a:avLst/>
-          </a:prstGeom>
-          <a:noFill/>
-        </p:spPr>
-        <p:txBody>
-          <a:bodyPr wrap="square">
-            <a:noAutofit/>
-          </a:bodyPr>
-          <a:lstStyle/>
-          <a:p>
-            <a:pPr>
-              <a:lnSpc>
-                <a:spcPts val="2200"/>
-              </a:lnSpc>
-            </a:pPr>
-            <a:r>
-              <a:rPr sz="2800" b="1">
-                <a:solidFill>
-                  <a:srgbClr val="1A1A2E"/>
-                </a:solidFill>
-                <a:latin typeface="Calibri"/>
-              </a:rPr>
-              <a:t>Implement track</a:t>
-            </a:r>
-          </a:p>
-        </p:txBody>
-      </p:sp>
-      <p:sp>
-        <p:nvSpPr>
-          <p:cNvPr id="3" name="TextBox 2"/>
-          <p:cNvSpPr txBox="1"/>
-          <p:nvPr/>
-        </p:nvSpPr>
-        <p:spPr>
-          <a:xfrm>
-            <a:off x="548640" y="1234440"/>
-            <a:ext cx="11064240" cy="4937760"/>
-          </a:xfrm>
-          <a:prstGeom prst="rect">
-            <a:avLst/>
-          </a:prstGeom>
-          <a:noFill/>
-        </p:spPr>
-        <p:txBody>
-          <a:bodyPr wrap="square">
-            <a:noAutofit/>
-          </a:bodyPr>
-          <a:lstStyle/>
-          <a:p>
-            <a:pPr lvl="0" marL="457200" indent="-228600">
-              <a:buFont typeface="Calibri"/>
-              <a:spcAft>
-                <a:spcPts val="1000"/>
-              </a:spcAft>
-              <a:buSzPct val="100000"/>
-              <a:buChar char="•"/>
-              <a:lnSpc>
-                <a:spcPts val="2200"/>
-              </a:lnSpc>
-            </a:pPr>
-            <a:r>
-              <a:rPr sz="2000" b="0">
-                <a:solidFill>
-                  <a:srgbClr val="333333"/>
-                </a:solidFill>
-                <a:latin typeface="Calibri"/>
-              </a:rPr>
-              <a:t>In the implement track, open this module's examples and the course `common/` solvers</a:t>
-            </a:r>
-          </a:p>
-          <a:p>
-            <a:pPr lvl="0" marL="457200" indent="-228600">
-              <a:buFont typeface="Calibri"/>
-              <a:spcAft>
-                <a:spcPts val="1000"/>
-              </a:spcAft>
-              <a:buSzPct val="100000"/>
-              <a:buChar char="•"/>
-              <a:lnSpc>
-                <a:spcPts val="2200"/>
-              </a:lnSpc>
-            </a:pPr>
-            <a:r>
-              <a:rPr sz="2000" b="0">
-                <a:solidFill>
-                  <a:srgbClr val="333333"/>
-                </a:solidFill>
-                <a:latin typeface="Calibri"/>
-              </a:rPr>
-              <a:t>Parse `tiny_legal.json`, run the algorithm with deterministic coordinates</a:t>
-            </a:r>
-          </a:p>
-          <a:p>
-            <a:pPr lvl="0" marL="457200" indent="-228600">
-              <a:buFont typeface="Calibri"/>
-              <a:spcAft>
-                <a:spcPts val="1000"/>
-              </a:spcAft>
-              <a:buSzPct val="100000"/>
-              <a:buChar char="•"/>
-              <a:lnSpc>
-                <a:spcPts val="2200"/>
-              </a:lnSpc>
-            </a:pPr>
-            <a:r>
-              <a:rPr sz="2000" b="0">
-                <a:solidFill>
-                  <a:srgbClr val="333333"/>
-                </a:solidFill>
-                <a:latin typeface="Calibri"/>
-              </a:rPr>
-              <a:t>Match the browser goldens before you claim the checklist</a:t>
-            </a:r>
-          </a:p>
-        </p:txBody>
-      </p:sp>
-      <p:sp>
-        <p:nvSpPr>
-          <p:cNvPr id="4" name="TextBox 3"/>
           <p:cNvSpPr txBox="1"/>
           <p:nvPr/>
         </p:nvSpPr>
